--- a/course/3d_slides_w9.pptx
+++ b/course/3d_slides_w9.pptx
@@ -220,7 +220,7 @@
           <a:p>
             <a:fld id="{64F484BD-A9A3-4CBB-88D6-39267B7F5B46}" type="datetimeFigureOut">
               <a:rPr lang="en-BE" smtClean="0"/>
-              <a:t>23/04/2025</a:t>
+              <a:t>30/05/2025</a:t>
             </a:fld>
             <a:endParaRPr lang="en-BE"/>
           </a:p>
@@ -572,6 +572,342 @@
 </p:notes>
 </file>
 
+<file path=ppt/notesSlides/notesSlide10.xml><?xml version="1.0" encoding="utf-8"?>
+<p:notes xmlns:a="http://schemas.openxmlformats.org/drawingml/2006/main" xmlns:r="http://schemas.openxmlformats.org/officeDocument/2006/relationships" xmlns:p="http://schemas.openxmlformats.org/presentationml/2006/main">
+  <p:cSld>
+    <p:spTree>
+      <p:nvGrpSpPr>
+        <p:cNvPr id="1" name=""/>
+        <p:cNvGrpSpPr/>
+        <p:nvPr/>
+      </p:nvGrpSpPr>
+      <p:grpSpPr>
+        <a:xfrm>
+          <a:off x="0" y="0"/>
+          <a:ext cx="0" cy="0"/>
+          <a:chOff x="0" y="0"/>
+          <a:chExt cx="0" cy="0"/>
+        </a:xfrm>
+      </p:grpSpPr>
+      <p:sp>
+        <p:nvSpPr>
+          <p:cNvPr id="2" name="Slide Image Placeholder 1"/>
+          <p:cNvSpPr>
+            <a:spLocks noGrp="1" noRot="1" noChangeAspect="1"/>
+          </p:cNvSpPr>
+          <p:nvPr>
+            <p:ph type="sldImg"/>
+          </p:nvPr>
+        </p:nvSpPr>
+        <p:spPr/>
+      </p:sp>
+      <p:sp>
+        <p:nvSpPr>
+          <p:cNvPr id="3" name="Notes Placeholder 2"/>
+          <p:cNvSpPr>
+            <a:spLocks noGrp="1"/>
+          </p:cNvSpPr>
+          <p:nvPr>
+            <p:ph type="body" idx="1"/>
+          </p:nvPr>
+        </p:nvSpPr>
+        <p:spPr/>
+        <p:txBody>
+          <a:bodyPr/>
+          <a:lstStyle/>
+          <a:p>
+            <a:endParaRPr lang="en-BE"/>
+          </a:p>
+        </p:txBody>
+      </p:sp>
+      <p:sp>
+        <p:nvSpPr>
+          <p:cNvPr id="4" name="Slide Number Placeholder 3"/>
+          <p:cNvSpPr>
+            <a:spLocks noGrp="1"/>
+          </p:cNvSpPr>
+          <p:nvPr>
+            <p:ph type="sldNum" sz="quarter" idx="5"/>
+          </p:nvPr>
+        </p:nvSpPr>
+        <p:spPr/>
+        <p:txBody>
+          <a:bodyPr/>
+          <a:lstStyle/>
+          <a:p>
+            <a:fld id="{947F9D2B-EF00-4575-9013-113DEEFD58FD}" type="slidenum">
+              <a:rPr lang="en-BE" smtClean="0"/>
+              <a:t>18</a:t>
+            </a:fld>
+            <a:endParaRPr lang="en-BE"/>
+          </a:p>
+        </p:txBody>
+      </p:sp>
+    </p:spTree>
+    <p:extLst>
+      <p:ext uri="{BB962C8B-B14F-4D97-AF65-F5344CB8AC3E}">
+        <p14:creationId xmlns:p14="http://schemas.microsoft.com/office/powerpoint/2010/main" val="3790561786"/>
+      </p:ext>
+    </p:extLst>
+  </p:cSld>
+  <p:clrMapOvr>
+    <a:masterClrMapping/>
+  </p:clrMapOvr>
+</p:notes>
+</file>
+
+<file path=ppt/notesSlides/notesSlide11.xml><?xml version="1.0" encoding="utf-8"?>
+<p:notes xmlns:a="http://schemas.openxmlformats.org/drawingml/2006/main" xmlns:r="http://schemas.openxmlformats.org/officeDocument/2006/relationships" xmlns:p="http://schemas.openxmlformats.org/presentationml/2006/main">
+  <p:cSld>
+    <p:spTree>
+      <p:nvGrpSpPr>
+        <p:cNvPr id="1" name=""/>
+        <p:cNvGrpSpPr/>
+        <p:nvPr/>
+      </p:nvGrpSpPr>
+      <p:grpSpPr>
+        <a:xfrm>
+          <a:off x="0" y="0"/>
+          <a:ext cx="0" cy="0"/>
+          <a:chOff x="0" y="0"/>
+          <a:chExt cx="0" cy="0"/>
+        </a:xfrm>
+      </p:grpSpPr>
+      <p:sp>
+        <p:nvSpPr>
+          <p:cNvPr id="2" name="Slide Image Placeholder 1"/>
+          <p:cNvSpPr>
+            <a:spLocks noGrp="1" noRot="1" noChangeAspect="1"/>
+          </p:cNvSpPr>
+          <p:nvPr>
+            <p:ph type="sldImg"/>
+          </p:nvPr>
+        </p:nvSpPr>
+        <p:spPr/>
+      </p:sp>
+      <p:sp>
+        <p:nvSpPr>
+          <p:cNvPr id="3" name="Notes Placeholder 2"/>
+          <p:cNvSpPr>
+            <a:spLocks noGrp="1"/>
+          </p:cNvSpPr>
+          <p:nvPr>
+            <p:ph type="body" idx="1"/>
+          </p:nvPr>
+        </p:nvSpPr>
+        <p:spPr/>
+        <p:txBody>
+          <a:bodyPr/>
+          <a:lstStyle/>
+          <a:p>
+            <a:endParaRPr lang="en-BE"/>
+          </a:p>
+        </p:txBody>
+      </p:sp>
+      <p:sp>
+        <p:nvSpPr>
+          <p:cNvPr id="4" name="Slide Number Placeholder 3"/>
+          <p:cNvSpPr>
+            <a:spLocks noGrp="1"/>
+          </p:cNvSpPr>
+          <p:nvPr>
+            <p:ph type="sldNum" sz="quarter" idx="5"/>
+          </p:nvPr>
+        </p:nvSpPr>
+        <p:spPr/>
+        <p:txBody>
+          <a:bodyPr/>
+          <a:lstStyle/>
+          <a:p>
+            <a:fld id="{947F9D2B-EF00-4575-9013-113DEEFD58FD}" type="slidenum">
+              <a:rPr lang="en-BE" smtClean="0"/>
+              <a:t>19</a:t>
+            </a:fld>
+            <a:endParaRPr lang="en-BE"/>
+          </a:p>
+        </p:txBody>
+      </p:sp>
+    </p:spTree>
+    <p:extLst>
+      <p:ext uri="{BB962C8B-B14F-4D97-AF65-F5344CB8AC3E}">
+        <p14:creationId xmlns:p14="http://schemas.microsoft.com/office/powerpoint/2010/main" val="1979957469"/>
+      </p:ext>
+    </p:extLst>
+  </p:cSld>
+  <p:clrMapOvr>
+    <a:masterClrMapping/>
+  </p:clrMapOvr>
+</p:notes>
+</file>
+
+<file path=ppt/notesSlides/notesSlide12.xml><?xml version="1.0" encoding="utf-8"?>
+<p:notes xmlns:a="http://schemas.openxmlformats.org/drawingml/2006/main" xmlns:r="http://schemas.openxmlformats.org/officeDocument/2006/relationships" xmlns:p="http://schemas.openxmlformats.org/presentationml/2006/main">
+  <p:cSld>
+    <p:spTree>
+      <p:nvGrpSpPr>
+        <p:cNvPr id="1" name=""/>
+        <p:cNvGrpSpPr/>
+        <p:nvPr/>
+      </p:nvGrpSpPr>
+      <p:grpSpPr>
+        <a:xfrm>
+          <a:off x="0" y="0"/>
+          <a:ext cx="0" cy="0"/>
+          <a:chOff x="0" y="0"/>
+          <a:chExt cx="0" cy="0"/>
+        </a:xfrm>
+      </p:grpSpPr>
+      <p:sp>
+        <p:nvSpPr>
+          <p:cNvPr id="2" name="Slide Image Placeholder 1"/>
+          <p:cNvSpPr>
+            <a:spLocks noGrp="1" noRot="1" noChangeAspect="1"/>
+          </p:cNvSpPr>
+          <p:nvPr>
+            <p:ph type="sldImg"/>
+          </p:nvPr>
+        </p:nvSpPr>
+        <p:spPr/>
+      </p:sp>
+      <p:sp>
+        <p:nvSpPr>
+          <p:cNvPr id="3" name="Notes Placeholder 2"/>
+          <p:cNvSpPr>
+            <a:spLocks noGrp="1"/>
+          </p:cNvSpPr>
+          <p:nvPr>
+            <p:ph type="body" idx="1"/>
+          </p:nvPr>
+        </p:nvSpPr>
+        <p:spPr/>
+        <p:txBody>
+          <a:bodyPr/>
+          <a:lstStyle/>
+          <a:p>
+            <a:endParaRPr lang="en-BE"/>
+          </a:p>
+        </p:txBody>
+      </p:sp>
+      <p:sp>
+        <p:nvSpPr>
+          <p:cNvPr id="4" name="Slide Number Placeholder 3"/>
+          <p:cNvSpPr>
+            <a:spLocks noGrp="1"/>
+          </p:cNvSpPr>
+          <p:nvPr>
+            <p:ph type="sldNum" sz="quarter" idx="5"/>
+          </p:nvPr>
+        </p:nvSpPr>
+        <p:spPr/>
+        <p:txBody>
+          <a:bodyPr/>
+          <a:lstStyle/>
+          <a:p>
+            <a:fld id="{947F9D2B-EF00-4575-9013-113DEEFD58FD}" type="slidenum">
+              <a:rPr lang="en-BE" smtClean="0"/>
+              <a:t>20</a:t>
+            </a:fld>
+            <a:endParaRPr lang="en-BE"/>
+          </a:p>
+        </p:txBody>
+      </p:sp>
+    </p:spTree>
+    <p:extLst>
+      <p:ext uri="{BB962C8B-B14F-4D97-AF65-F5344CB8AC3E}">
+        <p14:creationId xmlns:p14="http://schemas.microsoft.com/office/powerpoint/2010/main" val="3173827425"/>
+      </p:ext>
+    </p:extLst>
+  </p:cSld>
+  <p:clrMapOvr>
+    <a:masterClrMapping/>
+  </p:clrMapOvr>
+</p:notes>
+</file>
+
+<file path=ppt/notesSlides/notesSlide13.xml><?xml version="1.0" encoding="utf-8"?>
+<p:notes xmlns:a="http://schemas.openxmlformats.org/drawingml/2006/main" xmlns:r="http://schemas.openxmlformats.org/officeDocument/2006/relationships" xmlns:p="http://schemas.openxmlformats.org/presentationml/2006/main">
+  <p:cSld>
+    <p:spTree>
+      <p:nvGrpSpPr>
+        <p:cNvPr id="1" name=""/>
+        <p:cNvGrpSpPr/>
+        <p:nvPr/>
+      </p:nvGrpSpPr>
+      <p:grpSpPr>
+        <a:xfrm>
+          <a:off x="0" y="0"/>
+          <a:ext cx="0" cy="0"/>
+          <a:chOff x="0" y="0"/>
+          <a:chExt cx="0" cy="0"/>
+        </a:xfrm>
+      </p:grpSpPr>
+      <p:sp>
+        <p:nvSpPr>
+          <p:cNvPr id="2" name="Slide Image Placeholder 1"/>
+          <p:cNvSpPr>
+            <a:spLocks noGrp="1" noRot="1" noChangeAspect="1"/>
+          </p:cNvSpPr>
+          <p:nvPr>
+            <p:ph type="sldImg"/>
+          </p:nvPr>
+        </p:nvSpPr>
+        <p:spPr/>
+      </p:sp>
+      <p:sp>
+        <p:nvSpPr>
+          <p:cNvPr id="3" name="Notes Placeholder 2"/>
+          <p:cNvSpPr>
+            <a:spLocks noGrp="1"/>
+          </p:cNvSpPr>
+          <p:nvPr>
+            <p:ph type="body" idx="1"/>
+          </p:nvPr>
+        </p:nvSpPr>
+        <p:spPr/>
+        <p:txBody>
+          <a:bodyPr/>
+          <a:lstStyle/>
+          <a:p>
+            <a:endParaRPr lang="en-BE" dirty="0"/>
+          </a:p>
+        </p:txBody>
+      </p:sp>
+      <p:sp>
+        <p:nvSpPr>
+          <p:cNvPr id="4" name="Slide Number Placeholder 3"/>
+          <p:cNvSpPr>
+            <a:spLocks noGrp="1"/>
+          </p:cNvSpPr>
+          <p:nvPr>
+            <p:ph type="sldNum" sz="quarter" idx="5"/>
+          </p:nvPr>
+        </p:nvSpPr>
+        <p:spPr/>
+        <p:txBody>
+          <a:bodyPr/>
+          <a:lstStyle/>
+          <a:p>
+            <a:fld id="{947F9D2B-EF00-4575-9013-113DEEFD58FD}" type="slidenum">
+              <a:rPr lang="en-BE" smtClean="0"/>
+              <a:t>21</a:t>
+            </a:fld>
+            <a:endParaRPr lang="en-BE"/>
+          </a:p>
+        </p:txBody>
+      </p:sp>
+    </p:spTree>
+    <p:extLst>
+      <p:ext uri="{BB962C8B-B14F-4D97-AF65-F5344CB8AC3E}">
+        <p14:creationId xmlns:p14="http://schemas.microsoft.com/office/powerpoint/2010/main" val="3175056898"/>
+      </p:ext>
+    </p:extLst>
+  </p:cSld>
+  <p:clrMapOvr>
+    <a:masterClrMapping/>
+  </p:clrMapOvr>
+</p:notes>
+</file>
+
 <file path=ppt/notesSlides/notesSlide2.xml><?xml version="1.0" encoding="utf-8"?>
 <p:notes xmlns:a="http://schemas.openxmlformats.org/drawingml/2006/main" xmlns:r="http://schemas.openxmlformats.org/officeDocument/2006/relationships" xmlns:p="http://schemas.openxmlformats.org/presentationml/2006/main">
   <p:cSld>
@@ -829,13 +1165,7 @@
   <p:cSld>
     <p:spTree>
       <p:nvGrpSpPr>
-        <p:cNvPr id="1" name="">
-          <a:extLst>
-            <a:ext uri="{FF2B5EF4-FFF2-40B4-BE49-F238E27FC236}">
-              <a16:creationId xmlns:a16="http://schemas.microsoft.com/office/drawing/2014/main" id="{943AB226-F2E8-F7A6-12BA-4CE21E83623F}"/>
-            </a:ext>
-          </a:extLst>
-        </p:cNvPr>
+        <p:cNvPr id="1" name=""/>
         <p:cNvGrpSpPr/>
         <p:nvPr/>
       </p:nvGrpSpPr>
@@ -849,13 +1179,7 @@
       </p:grpSpPr>
       <p:sp>
         <p:nvSpPr>
-          <p:cNvPr id="2" name="Slide Image Placeholder 1">
-            <a:extLst>
-              <a:ext uri="{FF2B5EF4-FFF2-40B4-BE49-F238E27FC236}">
-                <a16:creationId xmlns:a16="http://schemas.microsoft.com/office/drawing/2014/main" id="{9E7BB9DD-3BCF-D113-6A06-259AD2F666B8}"/>
-              </a:ext>
-            </a:extLst>
-          </p:cNvPr>
+          <p:cNvPr id="2" name="Slide Image Placeholder 1"/>
           <p:cNvSpPr>
             <a:spLocks noGrp="1" noRot="1" noChangeAspect="1"/>
           </p:cNvSpPr>
@@ -867,13 +1191,7 @@
       </p:sp>
       <p:sp>
         <p:nvSpPr>
-          <p:cNvPr id="3" name="Notes Placeholder 2">
-            <a:extLst>
-              <a:ext uri="{FF2B5EF4-FFF2-40B4-BE49-F238E27FC236}">
-                <a16:creationId xmlns:a16="http://schemas.microsoft.com/office/drawing/2014/main" id="{6B1A81FF-5B4B-0466-2E0C-A343110101CF}"/>
-              </a:ext>
-            </a:extLst>
-          </p:cNvPr>
+          <p:cNvPr id="3" name="Notes Placeholder 2"/>
           <p:cNvSpPr>
             <a:spLocks noGrp="1"/>
           </p:cNvSpPr>
@@ -892,13 +1210,7 @@
       </p:sp>
       <p:sp>
         <p:nvSpPr>
-          <p:cNvPr id="4" name="Slide Number Placeholder 3">
-            <a:extLst>
-              <a:ext uri="{FF2B5EF4-FFF2-40B4-BE49-F238E27FC236}">
-                <a16:creationId xmlns:a16="http://schemas.microsoft.com/office/drawing/2014/main" id="{3A4AD95A-F8F6-A8DE-1A79-B53F7DD1B43F}"/>
-              </a:ext>
-            </a:extLst>
-          </p:cNvPr>
+          <p:cNvPr id="4" name="Slide Number Placeholder 3"/>
           <p:cNvSpPr>
             <a:spLocks noGrp="1"/>
           </p:cNvSpPr>
@@ -913,7 +1225,7 @@
           <a:p>
             <a:fld id="{947F9D2B-EF00-4575-9013-113DEEFD58FD}" type="slidenum">
               <a:rPr lang="en-BE" smtClean="0"/>
-              <a:t>17</a:t>
+              <a:t>13</a:t>
             </a:fld>
             <a:endParaRPr lang="en-BE"/>
           </a:p>
@@ -922,7 +1234,7 @@
     </p:spTree>
     <p:extLst>
       <p:ext uri="{BB962C8B-B14F-4D97-AF65-F5344CB8AC3E}">
-        <p14:creationId xmlns:p14="http://schemas.microsoft.com/office/powerpoint/2010/main" val="2539571405"/>
+        <p14:creationId xmlns:p14="http://schemas.microsoft.com/office/powerpoint/2010/main" val="1820343853"/>
       </p:ext>
     </p:extLst>
   </p:cSld>
@@ -976,7 +1288,7 @@
           <a:bodyPr/>
           <a:lstStyle/>
           <a:p>
-            <a:endParaRPr lang="en-BE" dirty="0"/>
+            <a:endParaRPr lang="en-BE"/>
           </a:p>
         </p:txBody>
       </p:sp>
@@ -997,7 +1309,7 @@
           <a:p>
             <a:fld id="{947F9D2B-EF00-4575-9013-113DEEFD58FD}" type="slidenum">
               <a:rPr lang="en-BE" smtClean="0"/>
-              <a:t>21</a:t>
+              <a:t>14</a:t>
             </a:fld>
             <a:endParaRPr lang="en-BE"/>
           </a:p>
@@ -1006,7 +1318,354 @@
     </p:spTree>
     <p:extLst>
       <p:ext uri="{BB962C8B-B14F-4D97-AF65-F5344CB8AC3E}">
-        <p14:creationId xmlns:p14="http://schemas.microsoft.com/office/powerpoint/2010/main" val="3175056898"/>
+        <p14:creationId xmlns:p14="http://schemas.microsoft.com/office/powerpoint/2010/main" val="574090785"/>
+      </p:ext>
+    </p:extLst>
+  </p:cSld>
+  <p:clrMapOvr>
+    <a:masterClrMapping/>
+  </p:clrMapOvr>
+</p:notes>
+</file>
+
+<file path=ppt/notesSlides/notesSlide7.xml><?xml version="1.0" encoding="utf-8"?>
+<p:notes xmlns:a="http://schemas.openxmlformats.org/drawingml/2006/main" xmlns:r="http://schemas.openxmlformats.org/officeDocument/2006/relationships" xmlns:p="http://schemas.openxmlformats.org/presentationml/2006/main">
+  <p:cSld>
+    <p:spTree>
+      <p:nvGrpSpPr>
+        <p:cNvPr id="1" name=""/>
+        <p:cNvGrpSpPr/>
+        <p:nvPr/>
+      </p:nvGrpSpPr>
+      <p:grpSpPr>
+        <a:xfrm>
+          <a:off x="0" y="0"/>
+          <a:ext cx="0" cy="0"/>
+          <a:chOff x="0" y="0"/>
+          <a:chExt cx="0" cy="0"/>
+        </a:xfrm>
+      </p:grpSpPr>
+      <p:sp>
+        <p:nvSpPr>
+          <p:cNvPr id="2" name="Slide Image Placeholder 1"/>
+          <p:cNvSpPr>
+            <a:spLocks noGrp="1" noRot="1" noChangeAspect="1"/>
+          </p:cNvSpPr>
+          <p:nvPr>
+            <p:ph type="sldImg"/>
+          </p:nvPr>
+        </p:nvSpPr>
+        <p:spPr/>
+      </p:sp>
+      <p:sp>
+        <p:nvSpPr>
+          <p:cNvPr id="3" name="Notes Placeholder 2"/>
+          <p:cNvSpPr>
+            <a:spLocks noGrp="1"/>
+          </p:cNvSpPr>
+          <p:nvPr>
+            <p:ph type="body" idx="1"/>
+          </p:nvPr>
+        </p:nvSpPr>
+        <p:spPr/>
+        <p:txBody>
+          <a:bodyPr/>
+          <a:lstStyle/>
+          <a:p>
+            <a:r>
+              <a:rPr lang="en-US" dirty="0"/>
+              <a:t>Because the </a:t>
+            </a:r>
+            <a:r>
+              <a:rPr lang="en-US" dirty="0" err="1"/>
+              <a:t>cpu</a:t>
+            </a:r>
+            <a:r>
+              <a:rPr lang="en-US" dirty="0"/>
+              <a:t> is wanted by *everyone*. In a game, physics, gameplay, audio, multiplayer code, is all running on the </a:t>
+            </a:r>
+            <a:r>
+              <a:rPr lang="en-US" dirty="0" err="1"/>
+              <a:t>cpu</a:t>
+            </a:r>
+            <a:r>
+              <a:rPr lang="en-US" dirty="0"/>
+              <a:t>. As well as discord, perhaps </a:t>
+            </a:r>
+            <a:r>
+              <a:rPr lang="en-US" dirty="0" err="1"/>
+              <a:t>youtube</a:t>
+            </a:r>
+            <a:r>
+              <a:rPr lang="en-US" dirty="0"/>
+              <a:t>… </a:t>
+            </a:r>
+          </a:p>
+          <a:p>
+            <a:r>
+              <a:rPr lang="en-US" dirty="0"/>
+              <a:t>The </a:t>
+            </a:r>
+            <a:r>
+              <a:rPr lang="en-US" dirty="0" err="1"/>
+              <a:t>gpu</a:t>
+            </a:r>
+            <a:r>
+              <a:rPr lang="en-US" dirty="0"/>
+              <a:t> is *ours*. It’s only means for the graphics bit. Tangent, modern AI like neural networks also run on the </a:t>
+            </a:r>
+            <a:r>
+              <a:rPr lang="en-US" dirty="0" err="1"/>
+              <a:t>gpu</a:t>
+            </a:r>
+            <a:r>
+              <a:rPr lang="en-US" dirty="0"/>
+              <a:t>, but usually not at the same time as real-time rendering&gt;</a:t>
+            </a:r>
+          </a:p>
+          <a:p>
+            <a:endParaRPr lang="en-US" dirty="0"/>
+          </a:p>
+          <a:p>
+            <a:r>
+              <a:rPr lang="en-US" dirty="0"/>
+              <a:t>But especially, the GPU is an incredibly powerful piece of hardware. It’s heavily multithreaded, with tons of cores. Each core is around 5 times slower than a </a:t>
+            </a:r>
+            <a:r>
+              <a:rPr lang="en-US" dirty="0" err="1"/>
+              <a:t>cpu</a:t>
+            </a:r>
+            <a:r>
+              <a:rPr lang="en-US" dirty="0"/>
+              <a:t> one, but a recent desktop GPU has thousands of times more cores.</a:t>
+            </a:r>
+            <a:endParaRPr lang="en-BE" dirty="0"/>
+          </a:p>
+        </p:txBody>
+      </p:sp>
+      <p:sp>
+        <p:nvSpPr>
+          <p:cNvPr id="4" name="Slide Number Placeholder 3"/>
+          <p:cNvSpPr>
+            <a:spLocks noGrp="1"/>
+          </p:cNvSpPr>
+          <p:nvPr>
+            <p:ph type="sldNum" sz="quarter" idx="5"/>
+          </p:nvPr>
+        </p:nvSpPr>
+        <p:spPr/>
+        <p:txBody>
+          <a:bodyPr/>
+          <a:lstStyle/>
+          <a:p>
+            <a:fld id="{947F9D2B-EF00-4575-9013-113DEEFD58FD}" type="slidenum">
+              <a:rPr lang="en-BE" smtClean="0"/>
+              <a:t>15</a:t>
+            </a:fld>
+            <a:endParaRPr lang="en-BE"/>
+          </a:p>
+        </p:txBody>
+      </p:sp>
+    </p:spTree>
+    <p:extLst>
+      <p:ext uri="{BB962C8B-B14F-4D97-AF65-F5344CB8AC3E}">
+        <p14:creationId xmlns:p14="http://schemas.microsoft.com/office/powerpoint/2010/main" val="2009828444"/>
+      </p:ext>
+    </p:extLst>
+  </p:cSld>
+  <p:clrMapOvr>
+    <a:masterClrMapping/>
+  </p:clrMapOvr>
+</p:notes>
+</file>
+
+<file path=ppt/notesSlides/notesSlide8.xml><?xml version="1.0" encoding="utf-8"?>
+<p:notes xmlns:a="http://schemas.openxmlformats.org/drawingml/2006/main" xmlns:r="http://schemas.openxmlformats.org/officeDocument/2006/relationships" xmlns:p="http://schemas.openxmlformats.org/presentationml/2006/main">
+  <p:cSld>
+    <p:spTree>
+      <p:nvGrpSpPr>
+        <p:cNvPr id="1" name=""/>
+        <p:cNvGrpSpPr/>
+        <p:nvPr/>
+      </p:nvGrpSpPr>
+      <p:grpSpPr>
+        <a:xfrm>
+          <a:off x="0" y="0"/>
+          <a:ext cx="0" cy="0"/>
+          <a:chOff x="0" y="0"/>
+          <a:chExt cx="0" cy="0"/>
+        </a:xfrm>
+      </p:grpSpPr>
+      <p:sp>
+        <p:nvSpPr>
+          <p:cNvPr id="2" name="Slide Image Placeholder 1"/>
+          <p:cNvSpPr>
+            <a:spLocks noGrp="1" noRot="1" noChangeAspect="1"/>
+          </p:cNvSpPr>
+          <p:nvPr>
+            <p:ph type="sldImg"/>
+          </p:nvPr>
+        </p:nvSpPr>
+        <p:spPr/>
+      </p:sp>
+      <p:sp>
+        <p:nvSpPr>
+          <p:cNvPr id="3" name="Notes Placeholder 2"/>
+          <p:cNvSpPr>
+            <a:spLocks noGrp="1"/>
+          </p:cNvSpPr>
+          <p:nvPr>
+            <p:ph type="body" idx="1"/>
+          </p:nvPr>
+        </p:nvSpPr>
+        <p:spPr/>
+        <p:txBody>
+          <a:bodyPr/>
+          <a:lstStyle/>
+          <a:p>
+            <a:r>
+              <a:rPr lang="en-US" dirty="0"/>
+              <a:t>The problem is: how do we do as much rendering as possible (as efficient as possible) on the GPU</a:t>
+            </a:r>
+            <a:endParaRPr lang="en-BE" dirty="0"/>
+          </a:p>
+        </p:txBody>
+      </p:sp>
+      <p:sp>
+        <p:nvSpPr>
+          <p:cNvPr id="4" name="Slide Number Placeholder 3"/>
+          <p:cNvSpPr>
+            <a:spLocks noGrp="1"/>
+          </p:cNvSpPr>
+          <p:nvPr>
+            <p:ph type="sldNum" sz="quarter" idx="5"/>
+          </p:nvPr>
+        </p:nvSpPr>
+        <p:spPr/>
+        <p:txBody>
+          <a:bodyPr/>
+          <a:lstStyle/>
+          <a:p>
+            <a:fld id="{947F9D2B-EF00-4575-9013-113DEEFD58FD}" type="slidenum">
+              <a:rPr lang="en-BE" smtClean="0"/>
+              <a:t>16</a:t>
+            </a:fld>
+            <a:endParaRPr lang="en-BE"/>
+          </a:p>
+        </p:txBody>
+      </p:sp>
+    </p:spTree>
+    <p:extLst>
+      <p:ext uri="{BB962C8B-B14F-4D97-AF65-F5344CB8AC3E}">
+        <p14:creationId xmlns:p14="http://schemas.microsoft.com/office/powerpoint/2010/main" val="433501874"/>
+      </p:ext>
+    </p:extLst>
+  </p:cSld>
+  <p:clrMapOvr>
+    <a:masterClrMapping/>
+  </p:clrMapOvr>
+</p:notes>
+</file>
+
+<file path=ppt/notesSlides/notesSlide9.xml><?xml version="1.0" encoding="utf-8"?>
+<p:notes xmlns:a="http://schemas.openxmlformats.org/drawingml/2006/main" xmlns:r="http://schemas.openxmlformats.org/officeDocument/2006/relationships" xmlns:p="http://schemas.openxmlformats.org/presentationml/2006/main">
+  <p:cSld>
+    <p:spTree>
+      <p:nvGrpSpPr>
+        <p:cNvPr id="1" name="">
+          <a:extLst>
+            <a:ext uri="{FF2B5EF4-FFF2-40B4-BE49-F238E27FC236}">
+              <a16:creationId xmlns:a16="http://schemas.microsoft.com/office/drawing/2014/main" id="{943AB226-F2E8-F7A6-12BA-4CE21E83623F}"/>
+            </a:ext>
+          </a:extLst>
+        </p:cNvPr>
+        <p:cNvGrpSpPr/>
+        <p:nvPr/>
+      </p:nvGrpSpPr>
+      <p:grpSpPr>
+        <a:xfrm>
+          <a:off x="0" y="0"/>
+          <a:ext cx="0" cy="0"/>
+          <a:chOff x="0" y="0"/>
+          <a:chExt cx="0" cy="0"/>
+        </a:xfrm>
+      </p:grpSpPr>
+      <p:sp>
+        <p:nvSpPr>
+          <p:cNvPr id="2" name="Slide Image Placeholder 1">
+            <a:extLst>
+              <a:ext uri="{FF2B5EF4-FFF2-40B4-BE49-F238E27FC236}">
+                <a16:creationId xmlns:a16="http://schemas.microsoft.com/office/drawing/2014/main" id="{9E7BB9DD-3BCF-D113-6A06-259AD2F666B8}"/>
+              </a:ext>
+            </a:extLst>
+          </p:cNvPr>
+          <p:cNvSpPr>
+            <a:spLocks noGrp="1" noRot="1" noChangeAspect="1"/>
+          </p:cNvSpPr>
+          <p:nvPr>
+            <p:ph type="sldImg"/>
+          </p:nvPr>
+        </p:nvSpPr>
+        <p:spPr/>
+      </p:sp>
+      <p:sp>
+        <p:nvSpPr>
+          <p:cNvPr id="3" name="Notes Placeholder 2">
+            <a:extLst>
+              <a:ext uri="{FF2B5EF4-FFF2-40B4-BE49-F238E27FC236}">
+                <a16:creationId xmlns:a16="http://schemas.microsoft.com/office/drawing/2014/main" id="{6B1A81FF-5B4B-0466-2E0C-A343110101CF}"/>
+              </a:ext>
+            </a:extLst>
+          </p:cNvPr>
+          <p:cNvSpPr>
+            <a:spLocks noGrp="1"/>
+          </p:cNvSpPr>
+          <p:nvPr>
+            <p:ph type="body" idx="1"/>
+          </p:nvPr>
+        </p:nvSpPr>
+        <p:spPr/>
+        <p:txBody>
+          <a:bodyPr/>
+          <a:lstStyle/>
+          <a:p>
+            <a:endParaRPr lang="en-BE"/>
+          </a:p>
+        </p:txBody>
+      </p:sp>
+      <p:sp>
+        <p:nvSpPr>
+          <p:cNvPr id="4" name="Slide Number Placeholder 3">
+            <a:extLst>
+              <a:ext uri="{FF2B5EF4-FFF2-40B4-BE49-F238E27FC236}">
+                <a16:creationId xmlns:a16="http://schemas.microsoft.com/office/drawing/2014/main" id="{3A4AD95A-F8F6-A8DE-1A79-B53F7DD1B43F}"/>
+              </a:ext>
+            </a:extLst>
+          </p:cNvPr>
+          <p:cNvSpPr>
+            <a:spLocks noGrp="1"/>
+          </p:cNvSpPr>
+          <p:nvPr>
+            <p:ph type="sldNum" sz="quarter" idx="5"/>
+          </p:nvPr>
+        </p:nvSpPr>
+        <p:spPr/>
+        <p:txBody>
+          <a:bodyPr/>
+          <a:lstStyle/>
+          <a:p>
+            <a:fld id="{947F9D2B-EF00-4575-9013-113DEEFD58FD}" type="slidenum">
+              <a:rPr lang="en-BE" smtClean="0"/>
+              <a:t>17</a:t>
+            </a:fld>
+            <a:endParaRPr lang="en-BE"/>
+          </a:p>
+        </p:txBody>
+      </p:sp>
+    </p:spTree>
+    <p:extLst>
+      <p:ext uri="{BB962C8B-B14F-4D97-AF65-F5344CB8AC3E}">
+        <p14:creationId xmlns:p14="http://schemas.microsoft.com/office/powerpoint/2010/main" val="2539571405"/>
       </p:ext>
     </p:extLst>
   </p:cSld>
@@ -2853,7 +3512,7 @@
           <a:p>
             <a:fld id="{B21044C9-3718-44C4-9063-5DAD08408240}" type="datetimeFigureOut">
               <a:rPr lang="en-BE" smtClean="0"/>
-              <a:t>23/04/2025</a:t>
+              <a:t>30/05/2025</a:t>
             </a:fld>
             <a:endParaRPr lang="en-BE"/>
           </a:p>
@@ -3053,7 +3712,7 @@
           <a:p>
             <a:fld id="{B21044C9-3718-44C4-9063-5DAD08408240}" type="datetimeFigureOut">
               <a:rPr lang="en-BE" smtClean="0"/>
-              <a:t>23/04/2025</a:t>
+              <a:t>30/05/2025</a:t>
             </a:fld>
             <a:endParaRPr lang="en-BE"/>
           </a:p>
@@ -3263,7 +3922,7 @@
           <a:p>
             <a:fld id="{B21044C9-3718-44C4-9063-5DAD08408240}" type="datetimeFigureOut">
               <a:rPr lang="en-BE" smtClean="0"/>
-              <a:t>23/04/2025</a:t>
+              <a:t>30/05/2025</a:t>
             </a:fld>
             <a:endParaRPr lang="en-BE"/>
           </a:p>
@@ -3405,7 +4064,7 @@
           <a:p>
             <a:fld id="{B21044C9-3718-44C4-9063-5DAD08408240}" type="datetimeFigureOut">
               <a:rPr lang="en-BE" smtClean="0"/>
-              <a:t>23/04/2025</a:t>
+              <a:t>30/05/2025</a:t>
             </a:fld>
             <a:endParaRPr lang="en-BE"/>
           </a:p>
@@ -3605,7 +4264,7 @@
           <a:p>
             <a:fld id="{B21044C9-3718-44C4-9063-5DAD08408240}" type="datetimeFigureOut">
               <a:rPr lang="en-BE" smtClean="0"/>
-              <a:t>23/04/2025</a:t>
+              <a:t>30/05/2025</a:t>
             </a:fld>
             <a:endParaRPr lang="en-BE"/>
           </a:p>
@@ -3881,7 +4540,7 @@
           <a:p>
             <a:fld id="{B21044C9-3718-44C4-9063-5DAD08408240}" type="datetimeFigureOut">
               <a:rPr lang="en-BE" smtClean="0"/>
-              <a:t>23/04/2025</a:t>
+              <a:t>30/05/2025</a:t>
             </a:fld>
             <a:endParaRPr lang="en-BE"/>
           </a:p>
@@ -4149,7 +4808,7 @@
           <a:p>
             <a:fld id="{B21044C9-3718-44C4-9063-5DAD08408240}" type="datetimeFigureOut">
               <a:rPr lang="en-BE" smtClean="0"/>
-              <a:t>23/04/2025</a:t>
+              <a:t>30/05/2025</a:t>
             </a:fld>
             <a:endParaRPr lang="en-BE"/>
           </a:p>
@@ -4564,7 +5223,7 @@
           <a:p>
             <a:fld id="{B21044C9-3718-44C4-9063-5DAD08408240}" type="datetimeFigureOut">
               <a:rPr lang="en-BE" smtClean="0"/>
-              <a:t>23/04/2025</a:t>
+              <a:t>30/05/2025</a:t>
             </a:fld>
             <a:endParaRPr lang="en-BE"/>
           </a:p>
@@ -4706,7 +5365,7 @@
           <a:p>
             <a:fld id="{B21044C9-3718-44C4-9063-5DAD08408240}" type="datetimeFigureOut">
               <a:rPr lang="en-BE" smtClean="0"/>
-              <a:t>23/04/2025</a:t>
+              <a:t>30/05/2025</a:t>
             </a:fld>
             <a:endParaRPr lang="en-BE"/>
           </a:p>
@@ -4819,7 +5478,7 @@
           <a:p>
             <a:fld id="{B21044C9-3718-44C4-9063-5DAD08408240}" type="datetimeFigureOut">
               <a:rPr lang="en-BE" smtClean="0"/>
-              <a:t>23/04/2025</a:t>
+              <a:t>30/05/2025</a:t>
             </a:fld>
             <a:endParaRPr lang="en-BE"/>
           </a:p>
@@ -5132,7 +5791,7 @@
           <a:p>
             <a:fld id="{B21044C9-3718-44C4-9063-5DAD08408240}" type="datetimeFigureOut">
               <a:rPr lang="en-BE" smtClean="0"/>
-              <a:t>23/04/2025</a:t>
+              <a:t>30/05/2025</a:t>
             </a:fld>
             <a:endParaRPr lang="en-BE"/>
           </a:p>
@@ -5375,7 +6034,7 @@
           <a:p>
             <a:fld id="{B21044C9-3718-44C4-9063-5DAD08408240}" type="datetimeFigureOut">
               <a:rPr lang="en-BE" smtClean="0"/>
-              <a:t>23/04/2025</a:t>
+              <a:t>30/05/2025</a:t>
             </a:fld>
             <a:endParaRPr lang="en-BE"/>
           </a:p>
@@ -6765,7 +7424,7 @@
           <p:nvPr/>
         </p:nvPicPr>
         <p:blipFill>
-          <a:blip r:embed="rId2">
+          <a:blip r:embed="rId3">
             <a:extLst>
               <a:ext uri="{28A0092B-C50C-407E-A947-70E740481C1C}">
                 <a14:useLocalDpi xmlns:a14="http://schemas.microsoft.com/office/drawing/2010/main" val="0"/>
@@ -7032,7 +7691,7 @@
           <p:nvPr/>
         </p:nvPicPr>
         <p:blipFill>
-          <a:blip r:embed="rId2">
+          <a:blip r:embed="rId3">
             <a:extLst>
               <a:ext uri="{28A0092B-C50C-407E-A947-70E740481C1C}">
                 <a14:useLocalDpi xmlns:a14="http://schemas.microsoft.com/office/drawing/2010/main" val="0"/>
@@ -7197,7 +7856,7 @@
           <p:nvPr/>
         </p:nvPicPr>
         <p:blipFill>
-          <a:blip r:embed="rId2">
+          <a:blip r:embed="rId3">
             <a:extLst>
               <a:ext uri="{28A0092B-C50C-407E-A947-70E740481C1C}">
                 <a14:useLocalDpi xmlns:a14="http://schemas.microsoft.com/office/drawing/2010/main" val="0"/>
@@ -7844,7 +8503,7 @@
           <p:nvPr/>
         </p:nvPicPr>
         <p:blipFill>
-          <a:blip r:embed="rId2">
+          <a:blip r:embed="rId3">
             <a:extLst>
               <a:ext uri="{28A0092B-C50C-407E-A947-70E740481C1C}">
                 <a14:useLocalDpi xmlns:a14="http://schemas.microsoft.com/office/drawing/2010/main" val="0"/>
@@ -7880,7 +8539,7 @@
           <p:nvPr/>
         </p:nvPicPr>
         <p:blipFill>
-          <a:blip r:embed="rId3">
+          <a:blip r:embed="rId4">
             <a:extLst>
               <a:ext uri="{28A0092B-C50C-407E-A947-70E740481C1C}">
                 <a14:useLocalDpi xmlns:a14="http://schemas.microsoft.com/office/drawing/2010/main" val="0"/>
@@ -7916,7 +8575,7 @@
           <p:nvPr/>
         </p:nvPicPr>
         <p:blipFill>
-          <a:blip r:embed="rId4">
+          <a:blip r:embed="rId5">
             <a:extLst>
               <a:ext uri="{28A0092B-C50C-407E-A947-70E740481C1C}">
                 <a14:useLocalDpi xmlns:a14="http://schemas.microsoft.com/office/drawing/2010/main" val="0"/>
@@ -7952,7 +8611,7 @@
           <p:nvPr/>
         </p:nvPicPr>
         <p:blipFill>
-          <a:blip r:embed="rId5">
+          <a:blip r:embed="rId6">
             <a:extLst>
               <a:ext uri="{28A0092B-C50C-407E-A947-70E740481C1C}">
                 <a14:useLocalDpi xmlns:a14="http://schemas.microsoft.com/office/drawing/2010/main" val="0"/>
@@ -8394,7 +9053,7 @@
           <p:nvPr/>
         </p:nvPicPr>
         <p:blipFill>
-          <a:blip r:embed="rId2"/>
+          <a:blip r:embed="rId3"/>
           <a:stretch>
             <a:fillRect/>
           </a:stretch>
